--- a/askdb/docs/presentations/AskDB_AI_Data_Platform_Redesigned.pptx
+++ b/askdb/docs/presentations/AskDB_AI_Data_Platform_Redesigned.pptx
@@ -136,6 +136,137 @@
     </p:ext>
   </p:extLst>
 </p:presentation>
+</file>
+
+<file path=ppt/changesInfos/changesInfo1.xml><?xml version="1.0" encoding="utf-8"?>
+<pc:chgInfo xmlns:a="http://schemas.openxmlformats.org/drawingml/2006/main" xmlns:r="http://schemas.openxmlformats.org/officeDocument/2006/relationships" xmlns:ac="http://schemas.microsoft.com/office/drawing/2013/main/command" xmlns:pc="http://schemas.microsoft.com/office/powerpoint/2013/main/command">
+  <pc:docChgLst>
+    <pc:chgData name="KONDHALKAR, RAHUL" userId="abd60e2f-6f69-4b10-9153-eb83f92a138a" providerId="ADAL" clId="{5E59A1F2-6D70-49F8-9189-ACECFB721298}"/>
+    <pc:docChg chg="custSel modSld">
+      <pc:chgData name="KONDHALKAR, RAHUL" userId="abd60e2f-6f69-4b10-9153-eb83f92a138a" providerId="ADAL" clId="{5E59A1F2-6D70-49F8-9189-ACECFB721298}" dt="2026-10-13T14:08:37.766" v="2" actId="1036"/>
+      <pc:docMkLst>
+        <pc:docMk/>
+      </pc:docMkLst>
+      <pc:sldChg chg="delSp mod">
+        <pc:chgData name="KONDHALKAR, RAHUL" userId="abd60e2f-6f69-4b10-9153-eb83f92a138a" providerId="ADAL" clId="{5E59A1F2-6D70-49F8-9189-ACECFB721298}" dt="2026-10-13T14:01:37.762" v="0" actId="478"/>
+        <pc:sldMkLst>
+          <pc:docMk/>
+          <pc:sldMk cId="0" sldId="260"/>
+        </pc:sldMkLst>
+        <pc:cxnChg chg="del">
+          <ac:chgData name="KONDHALKAR, RAHUL" userId="abd60e2f-6f69-4b10-9153-eb83f92a138a" providerId="ADAL" clId="{5E59A1F2-6D70-49F8-9189-ACECFB721298}" dt="2026-10-13T14:01:37.762" v="0" actId="478"/>
+          <ac:cxnSpMkLst>
+            <pc:docMk/>
+            <pc:sldMk cId="0" sldId="260"/>
+            <ac:cxnSpMk id="49" creationId="{00000000-0000-0000-0000-000000000000}"/>
+          </ac:cxnSpMkLst>
+        </pc:cxnChg>
+      </pc:sldChg>
+      <pc:sldChg chg="delSp mod">
+        <pc:chgData name="KONDHALKAR, RAHUL" userId="abd60e2f-6f69-4b10-9153-eb83f92a138a" providerId="ADAL" clId="{5E59A1F2-6D70-49F8-9189-ACECFB721298}" dt="2026-10-13T14:06:03.615" v="1" actId="478"/>
+        <pc:sldMkLst>
+          <pc:docMk/>
+          <pc:sldMk cId="0" sldId="266"/>
+        </pc:sldMkLst>
+        <pc:spChg chg="del">
+          <ac:chgData name="KONDHALKAR, RAHUL" userId="abd60e2f-6f69-4b10-9153-eb83f92a138a" providerId="ADAL" clId="{5E59A1F2-6D70-49F8-9189-ACECFB721298}" dt="2026-10-13T14:06:03.615" v="1" actId="478"/>
+          <ac:spMkLst>
+            <pc:docMk/>
+            <pc:sldMk cId="0" sldId="266"/>
+            <ac:spMk id="44" creationId="{00000000-0000-0000-0000-000000000000}"/>
+          </ac:spMkLst>
+        </pc:spChg>
+      </pc:sldChg>
+      <pc:sldChg chg="modSp mod">
+        <pc:chgData name="KONDHALKAR, RAHUL" userId="abd60e2f-6f69-4b10-9153-eb83f92a138a" providerId="ADAL" clId="{5E59A1F2-6D70-49F8-9189-ACECFB721298}" dt="2026-10-13T14:08:37.766" v="2" actId="1036"/>
+        <pc:sldMkLst>
+          <pc:docMk/>
+          <pc:sldMk cId="0" sldId="267"/>
+        </pc:sldMkLst>
+        <pc:spChg chg="mod">
+          <ac:chgData name="KONDHALKAR, RAHUL" userId="abd60e2f-6f69-4b10-9153-eb83f92a138a" providerId="ADAL" clId="{5E59A1F2-6D70-49F8-9189-ACECFB721298}" dt="2026-10-13T14:08:37.766" v="2" actId="1036"/>
+          <ac:spMkLst>
+            <pc:docMk/>
+            <pc:sldMk cId="0" sldId="267"/>
+            <ac:spMk id="2" creationId="{00000000-0000-0000-0000-000000000000}"/>
+          </ac:spMkLst>
+        </pc:spChg>
+        <pc:spChg chg="mod">
+          <ac:chgData name="KONDHALKAR, RAHUL" userId="abd60e2f-6f69-4b10-9153-eb83f92a138a" providerId="ADAL" clId="{5E59A1F2-6D70-49F8-9189-ACECFB721298}" dt="2026-10-13T14:08:37.766" v="2" actId="1036"/>
+          <ac:spMkLst>
+            <pc:docMk/>
+            <pc:sldMk cId="0" sldId="267"/>
+            <ac:spMk id="3" creationId="{00000000-0000-0000-0000-000000000000}"/>
+          </ac:spMkLst>
+        </pc:spChg>
+        <pc:spChg chg="mod">
+          <ac:chgData name="KONDHALKAR, RAHUL" userId="abd60e2f-6f69-4b10-9153-eb83f92a138a" providerId="ADAL" clId="{5E59A1F2-6D70-49F8-9189-ACECFB721298}" dt="2026-10-13T14:08:37.766" v="2" actId="1036"/>
+          <ac:spMkLst>
+            <pc:docMk/>
+            <pc:sldMk cId="0" sldId="267"/>
+            <ac:spMk id="4" creationId="{00000000-0000-0000-0000-000000000000}"/>
+          </ac:spMkLst>
+        </pc:spChg>
+        <pc:spChg chg="mod">
+          <ac:chgData name="KONDHALKAR, RAHUL" userId="abd60e2f-6f69-4b10-9153-eb83f92a138a" providerId="ADAL" clId="{5E59A1F2-6D70-49F8-9189-ACECFB721298}" dt="2026-10-13T14:08:37.766" v="2" actId="1036"/>
+          <ac:spMkLst>
+            <pc:docMk/>
+            <pc:sldMk cId="0" sldId="267"/>
+            <ac:spMk id="8" creationId="{00000000-0000-0000-0000-000000000000}"/>
+          </ac:spMkLst>
+        </pc:spChg>
+        <pc:spChg chg="mod">
+          <ac:chgData name="KONDHALKAR, RAHUL" userId="abd60e2f-6f69-4b10-9153-eb83f92a138a" providerId="ADAL" clId="{5E59A1F2-6D70-49F8-9189-ACECFB721298}" dt="2026-10-13T14:08:37.766" v="2" actId="1036"/>
+          <ac:spMkLst>
+            <pc:docMk/>
+            <pc:sldMk cId="0" sldId="267"/>
+            <ac:spMk id="11" creationId="{00000000-0000-0000-0000-000000000000}"/>
+          </ac:spMkLst>
+        </pc:spChg>
+        <pc:spChg chg="mod">
+          <ac:chgData name="KONDHALKAR, RAHUL" userId="abd60e2f-6f69-4b10-9153-eb83f92a138a" providerId="ADAL" clId="{5E59A1F2-6D70-49F8-9189-ACECFB721298}" dt="2026-10-13T14:08:37.766" v="2" actId="1036"/>
+          <ac:spMkLst>
+            <pc:docMk/>
+            <pc:sldMk cId="0" sldId="267"/>
+            <ac:spMk id="14" creationId="{00000000-0000-0000-0000-000000000000}"/>
+          </ac:spMkLst>
+        </pc:spChg>
+        <pc:spChg chg="mod">
+          <ac:chgData name="KONDHALKAR, RAHUL" userId="abd60e2f-6f69-4b10-9153-eb83f92a138a" providerId="ADAL" clId="{5E59A1F2-6D70-49F8-9189-ACECFB721298}" dt="2026-10-13T14:08:37.766" v="2" actId="1036"/>
+          <ac:spMkLst>
+            <pc:docMk/>
+            <pc:sldMk cId="0" sldId="267"/>
+            <ac:spMk id="15" creationId="{00000000-0000-0000-0000-000000000000}"/>
+          </ac:spMkLst>
+        </pc:spChg>
+        <pc:spChg chg="mod">
+          <ac:chgData name="KONDHALKAR, RAHUL" userId="abd60e2f-6f69-4b10-9153-eb83f92a138a" providerId="ADAL" clId="{5E59A1F2-6D70-49F8-9189-ACECFB721298}" dt="2026-10-13T14:08:37.766" v="2" actId="1036"/>
+          <ac:spMkLst>
+            <pc:docMk/>
+            <pc:sldMk cId="0" sldId="267"/>
+            <ac:spMk id="18" creationId="{00000000-0000-0000-0000-000000000000}"/>
+          </ac:spMkLst>
+        </pc:spChg>
+        <pc:spChg chg="mod">
+          <ac:chgData name="KONDHALKAR, RAHUL" userId="abd60e2f-6f69-4b10-9153-eb83f92a138a" providerId="ADAL" clId="{5E59A1F2-6D70-49F8-9189-ACECFB721298}" dt="2026-10-13T14:08:37.766" v="2" actId="1036"/>
+          <ac:spMkLst>
+            <pc:docMk/>
+            <pc:sldMk cId="0" sldId="267"/>
+            <ac:spMk id="25" creationId="{00000000-0000-0000-0000-000000000000}"/>
+          </ac:spMkLst>
+        </pc:spChg>
+        <pc:spChg chg="mod">
+          <ac:chgData name="KONDHALKAR, RAHUL" userId="abd60e2f-6f69-4b10-9153-eb83f92a138a" providerId="ADAL" clId="{5E59A1F2-6D70-49F8-9189-ACECFB721298}" dt="2026-10-13T14:08:37.766" v="2" actId="1036"/>
+          <ac:spMkLst>
+            <pc:docMk/>
+            <pc:sldMk cId="0" sldId="267"/>
+            <ac:spMk id="29" creationId="{00000000-0000-0000-0000-000000000000}"/>
+          </ac:spMkLst>
+        </pc:spChg>
+      </pc:sldChg>
+    </pc:docChg>
+  </pc:docChgLst>
+</pc:chgInfo>
 </file>
 
 <file path=ppt/slideLayouts/slideLayout1.xml><?xml version="1.0" encoding="utf-8"?>
@@ -8635,45 +8766,6 @@
           </a:fontRef>
         </p:style>
       </p:cxnSp>
-      <p:sp>
-        <p:nvSpPr>
-          <p:cNvPr id="44" name="TextBox 43"/>
-          <p:cNvSpPr txBox="1"/>
-          <p:nvPr/>
-        </p:nvSpPr>
-        <p:spPr>
-          <a:xfrm>
-            <a:off x="914400" y="5074920"/>
-            <a:ext cx="9875520" cy="228600"/>
-          </a:xfrm>
-          <a:prstGeom prst="rect">
-            <a:avLst/>
-          </a:prstGeom>
-          <a:noFill/>
-        </p:spPr>
-        <p:txBody>
-          <a:bodyPr wrap="square" lIns="54864" tIns="54864" rIns="54864" bIns="54864" anchor="t">
-            <a:spAutoFit/>
-          </a:bodyPr>
-          <a:lstStyle/>
-          <a:p>
-            <a:pPr algn="l">
-              <a:spcAft>
-                <a:spcPts val="0"/>
-              </a:spcAft>
-            </a:pPr>
-            <a:r>
-              <a:rPr sz="900" b="0" i="1">
-                <a:solidFill>
-                  <a:srgbClr val="97A4B7"/>
-                </a:solidFill>
-                <a:latin typeface="Aptos"/>
-              </a:rPr>
-              <a:t>Illustrative business relationship graph — confirm which links are currently used by query generation.</a:t>
-            </a:r>
-          </a:p>
-        </p:txBody>
-      </p:sp>
     </p:spTree>
   </p:cSld>
   <p:clrMapOvr>
@@ -8715,7 +8807,7 @@
         </p:nvSpPr>
         <p:spPr>
           <a:xfrm>
-            <a:off x="502920" y="219456"/>
+            <a:off x="502920" y="228600"/>
             <a:ext cx="6400800" cy="228600"/>
           </a:xfrm>
           <a:prstGeom prst="rect">
@@ -8754,7 +8846,7 @@
         </p:nvSpPr>
         <p:spPr>
           <a:xfrm>
-            <a:off x="502920" y="512064"/>
+            <a:off x="502920" y="521208"/>
             <a:ext cx="10972800" cy="502920"/>
           </a:xfrm>
           <a:prstGeom prst="rect">
@@ -8793,7 +8885,7 @@
         </p:nvSpPr>
         <p:spPr>
           <a:xfrm>
-            <a:off x="530352" y="1033271"/>
+            <a:off x="530352" y="1042415"/>
             <a:ext cx="10972800" cy="320040"/>
           </a:xfrm>
           <a:prstGeom prst="rect">
@@ -8832,7 +8924,7 @@
         </p:nvSpPr>
         <p:spPr>
           <a:xfrm>
-            <a:off x="530352" y="1417320"/>
+            <a:off x="530352" y="1426464"/>
             <a:ext cx="11018520" cy="16459"/>
           </a:xfrm>
           <a:prstGeom prst="rect">
@@ -8878,7 +8970,7 @@
         </p:nvSpPr>
         <p:spPr>
           <a:xfrm>
-            <a:off x="530352" y="1417320"/>
+            <a:off x="530352" y="1426464"/>
             <a:ext cx="658368" cy="16459"/>
           </a:xfrm>
           <a:prstGeom prst="rect">
@@ -8924,7 +9016,7 @@
         </p:nvSpPr>
         <p:spPr>
           <a:xfrm>
-            <a:off x="9738360" y="228600"/>
+            <a:off x="9738360" y="237744"/>
             <a:ext cx="1051560" cy="201168"/>
           </a:xfrm>
           <a:prstGeom prst="rect">
@@ -8963,7 +9055,7 @@
         </p:nvSpPr>
         <p:spPr>
           <a:xfrm>
-            <a:off x="10808208" y="228600"/>
+            <a:off x="10808208" y="237744"/>
             <a:ext cx="713232" cy="201168"/>
           </a:xfrm>
           <a:prstGeom prst="rect">
@@ -9098,7 +9190,7 @@
         </p:nvSpPr>
         <p:spPr>
           <a:xfrm>
-            <a:off x="594360" y="1600200"/>
+            <a:off x="594360" y="1609344"/>
             <a:ext cx="3429000" cy="1417320"/>
           </a:xfrm>
           <a:prstGeom prst="roundRect">
@@ -9146,7 +9238,7 @@
         </p:nvSpPr>
         <p:spPr>
           <a:xfrm>
-            <a:off x="594360" y="1600200"/>
+            <a:off x="594360" y="1609344"/>
             <a:ext cx="64008" cy="1417320"/>
           </a:xfrm>
           <a:prstGeom prst="rect">
@@ -9192,7 +9284,7 @@
         </p:nvSpPr>
         <p:spPr>
           <a:xfrm>
-            <a:off x="3611880" y="1728216"/>
+            <a:off x="3611880" y="1737360"/>
             <a:ext cx="274320" cy="274320"/>
           </a:xfrm>
           <a:prstGeom prst="ellipse">
@@ -9238,7 +9330,7 @@
         </p:nvSpPr>
         <p:spPr>
           <a:xfrm>
-            <a:off x="3683203" y="1799539"/>
+            <a:off x="3683203" y="1808683"/>
             <a:ext cx="131673" cy="131673"/>
           </a:xfrm>
           <a:prstGeom prst="ellipse">
@@ -9284,7 +9376,7 @@
         </p:nvSpPr>
         <p:spPr>
           <a:xfrm>
-            <a:off x="758952" y="1737360"/>
+            <a:off x="758952" y="1746504"/>
             <a:ext cx="2770632" cy="320040"/>
           </a:xfrm>
           <a:prstGeom prst="rect">
@@ -9323,7 +9415,7 @@
         </p:nvSpPr>
         <p:spPr>
           <a:xfrm>
-            <a:off x="731520" y="2130552"/>
+            <a:off x="731520" y="2139696"/>
             <a:ext cx="3172968" cy="795528"/>
           </a:xfrm>
           <a:prstGeom prst="rect">
@@ -9378,7 +9470,7 @@
         </p:nvSpPr>
         <p:spPr>
           <a:xfrm>
-            <a:off x="4343400" y="1600200"/>
+            <a:off x="4343400" y="1609344"/>
             <a:ext cx="3429000" cy="1417320"/>
           </a:xfrm>
           <a:prstGeom prst="roundRect">
@@ -9426,7 +9518,7 @@
         </p:nvSpPr>
         <p:spPr>
           <a:xfrm>
-            <a:off x="4343400" y="1600200"/>
+            <a:off x="4343400" y="1609344"/>
             <a:ext cx="64008" cy="1417320"/>
           </a:xfrm>
           <a:prstGeom prst="rect">
@@ -9472,7 +9564,7 @@
         </p:nvSpPr>
         <p:spPr>
           <a:xfrm>
-            <a:off x="7360919" y="1728216"/>
+            <a:off x="7360919" y="1737360"/>
             <a:ext cx="274320" cy="274320"/>
           </a:xfrm>
           <a:prstGeom prst="ellipse">
@@ -9518,7 +9610,7 @@
         </p:nvSpPr>
         <p:spPr>
           <a:xfrm>
-            <a:off x="7432243" y="1799539"/>
+            <a:off x="7432243" y="1808683"/>
             <a:ext cx="131673" cy="131673"/>
           </a:xfrm>
           <a:prstGeom prst="homePlate">
@@ -9564,7 +9656,7 @@
         </p:nvSpPr>
         <p:spPr>
           <a:xfrm>
-            <a:off x="4507992" y="1737360"/>
+            <a:off x="4507992" y="1746504"/>
             <a:ext cx="2770632" cy="320040"/>
           </a:xfrm>
           <a:prstGeom prst="rect">
@@ -9603,7 +9695,7 @@
         </p:nvSpPr>
         <p:spPr>
           <a:xfrm>
-            <a:off x="4480560" y="2130552"/>
+            <a:off x="4480560" y="2139696"/>
             <a:ext cx="3172968" cy="795528"/>
           </a:xfrm>
           <a:prstGeom prst="rect">
@@ -9658,7 +9750,7 @@
         </p:nvSpPr>
         <p:spPr>
           <a:xfrm>
-            <a:off x="8092440" y="1600200"/>
+            <a:off x="8092440" y="1609344"/>
             <a:ext cx="3429000" cy="1417320"/>
           </a:xfrm>
           <a:prstGeom prst="roundRect">
@@ -9706,7 +9798,7 @@
         </p:nvSpPr>
         <p:spPr>
           <a:xfrm>
-            <a:off x="8092440" y="1600200"/>
+            <a:off x="8092440" y="1609344"/>
             <a:ext cx="64008" cy="1417320"/>
           </a:xfrm>
           <a:prstGeom prst="rect">
@@ -9752,7 +9844,7 @@
         </p:nvSpPr>
         <p:spPr>
           <a:xfrm>
-            <a:off x="11109959" y="1728216"/>
+            <a:off x="11109959" y="1737360"/>
             <a:ext cx="274320" cy="274320"/>
           </a:xfrm>
           <a:prstGeom prst="ellipse">
@@ -9798,7 +9890,7 @@
         </p:nvSpPr>
         <p:spPr>
           <a:xfrm>
-            <a:off x="11181283" y="1799539"/>
+            <a:off x="11181283" y="1808683"/>
             <a:ext cx="131673" cy="131673"/>
           </a:xfrm>
           <a:prstGeom prst="homePlate">
@@ -9844,7 +9936,7 @@
         </p:nvSpPr>
         <p:spPr>
           <a:xfrm>
-            <a:off x="8257031" y="1737360"/>
+            <a:off x="8257031" y="1746504"/>
             <a:ext cx="2770632" cy="320040"/>
           </a:xfrm>
           <a:prstGeom prst="rect">
@@ -9883,7 +9975,7 @@
         </p:nvSpPr>
         <p:spPr>
           <a:xfrm>
-            <a:off x="8229600" y="2130552"/>
+            <a:off x="8229600" y="2139696"/>
             <a:ext cx="3172968" cy="795528"/>
           </a:xfrm>
           <a:prstGeom prst="rect">
@@ -9938,7 +10030,7 @@
         </p:nvSpPr>
         <p:spPr>
           <a:xfrm>
-            <a:off x="685800" y="3520440"/>
+            <a:off x="685800" y="3529584"/>
             <a:ext cx="10789920" cy="1417320"/>
           </a:xfrm>
           <a:prstGeom prst="roundRect">
@@ -9986,7 +10078,7 @@
         </p:nvSpPr>
         <p:spPr>
           <a:xfrm>
-            <a:off x="914400" y="3730752"/>
+            <a:off x="914400" y="3739896"/>
             <a:ext cx="2057400" cy="274320"/>
           </a:xfrm>
           <a:prstGeom prst="rect">
@@ -10025,7 +10117,7 @@
         </p:nvSpPr>
         <p:spPr>
           <a:xfrm>
-            <a:off x="2926080" y="3675887"/>
+            <a:off x="2926080" y="3685031"/>
             <a:ext cx="8046720" cy="1051560"/>
           </a:xfrm>
           <a:prstGeom prst="rect">
@@ -10096,7 +10188,7 @@
         </p:nvSpPr>
         <p:spPr>
           <a:xfrm>
-            <a:off x="822960" y="5303520"/>
+            <a:off x="822960" y="5312664"/>
             <a:ext cx="10241280" cy="228600"/>
           </a:xfrm>
           <a:prstGeom prst="rect">
@@ -24340,41 +24432,6 @@
               <a:srgbClr val="37DAEF"/>
             </a:solidFill>
             <a:tailEnd type="none"/>
-          </a:ln>
-        </p:spPr>
-        <p:style>
-          <a:lnRef idx="2">
-            <a:schemeClr val="accent1"/>
-          </a:lnRef>
-          <a:fillRef idx="0">
-            <a:schemeClr val="accent1"/>
-          </a:fillRef>
-          <a:effectRef idx="1">
-            <a:schemeClr val="accent1"/>
-          </a:effectRef>
-          <a:fontRef idx="minor">
-            <a:schemeClr val="tx1"/>
-          </a:fontRef>
-        </p:style>
-      </p:cxnSp>
-      <p:cxnSp>
-        <p:nvCxnSpPr>
-          <p:cNvPr id="49" name="Connector 48"/>
-          <p:cNvCxnSpPr/>
-          <p:nvPr/>
-        </p:nvCxnSpPr>
-        <p:spPr>
-          <a:xfrm>
-            <a:off x="3767328" y="3657600"/>
-            <a:ext cx="0" cy="548640"/>
-          </a:xfrm>
-          <a:prstGeom prst="line">
-            <a:avLst/>
-          </a:prstGeom>
-          <a:ln w="22860">
-            <a:solidFill>
-              <a:srgbClr val="303C4C"/>
-            </a:solidFill>
           </a:ln>
         </p:spPr>
         <p:style>
@@ -32649,4 +32706,10 @@
   </a:objectDefaults>
   <a:extraClrSchemeLst/>
 </a:theme>
+</file>
+
+<file path=docMetadata/LabelInfo.xml><?xml version="1.0" encoding="utf-8"?>
+<clbl:labelList xmlns:clbl="http://schemas.microsoft.com/office/2020/mipLabelMetadata">
+  <clbl:label id="{e760c494-6550-44b4-8258-77c175d778b7}" enabled="1" method="Privileged" siteId="{76a2ae5a-9f00-4f6b-95ed-5d33d77c4d61}" removed="0"/>
+</clbl:labelList>
 </file>